--- a/프로젝트계획서_별지_사실확인반영.pptx
+++ b/프로젝트계획서_별지_사실확인반영.pptx
@@ -20982,7 +20982,7 @@
         <p:spPr>
           <a:xfrm>
             <a:off x="685800" y="1920239"/>
-            <a:ext cx="1371600" cy="274320"/>
+            <a:ext cx="1280160" cy="274320"/>
           </a:xfrm>
           <a:prstGeom prst="rect">
             <a:avLst/>
@@ -21020,8 +21020,8 @@
         </p:nvSpPr>
         <p:spPr>
           <a:xfrm>
-            <a:off x="2148840" y="1920239"/>
-            <a:ext cx="502920" cy="274320"/>
+            <a:off x="2029968" y="1920239"/>
+            <a:ext cx="457200" cy="274320"/>
           </a:xfrm>
           <a:prstGeom prst="rect">
             <a:avLst/>
@@ -21059,7 +21059,7 @@
         </p:nvSpPr>
         <p:spPr>
           <a:xfrm>
-            <a:off x="2743200" y="1920239"/>
+            <a:off x="2578608" y="1920239"/>
             <a:ext cx="2395728" cy="274320"/>
           </a:xfrm>
           <a:prstGeom prst="rect">
@@ -21098,8 +21098,8 @@
         </p:nvSpPr>
         <p:spPr>
           <a:xfrm>
-            <a:off x="5248656" y="1920239"/>
-            <a:ext cx="1371600" cy="274320"/>
+            <a:off x="5084064" y="1920239"/>
+            <a:ext cx="1536192" cy="274320"/>
           </a:xfrm>
           <a:prstGeom prst="rect">
             <a:avLst/>
@@ -21198,7 +21198,7 @@
         <p:spPr>
           <a:xfrm>
             <a:off x="685800" y="2331720"/>
-            <a:ext cx="1371600" cy="868680"/>
+            <a:ext cx="1280160" cy="868680"/>
           </a:xfrm>
           <a:prstGeom prst="rect">
             <a:avLst/>
@@ -21257,8 +21257,8 @@
         </p:nvSpPr>
         <p:spPr>
           <a:xfrm>
-            <a:off x="2148840" y="2331720"/>
-            <a:ext cx="502920" cy="868680"/>
+            <a:off x="2029968" y="2331720"/>
+            <a:ext cx="457200" cy="868680"/>
           </a:xfrm>
           <a:prstGeom prst="rect">
             <a:avLst/>
@@ -21296,7 +21296,7 @@
         </p:nvSpPr>
         <p:spPr>
           <a:xfrm>
-            <a:off x="2743200" y="2331720"/>
+            <a:off x="2578608" y="2331720"/>
             <a:ext cx="2395728" cy="868680"/>
           </a:xfrm>
           <a:prstGeom prst="rect">
@@ -21343,38 +21343,20 @@
                 <a:ea typeface="Pretendard"/>
                 <a:cs typeface="Pretendard"/>
               </a:rPr>
-              <a:t>주차면 263곳, 반경 100m 안 반납 금지</a:t>
-            </a:r>
-          </a:p>
-        </p:txBody>
-      </p:sp>
-      <p:sp>
-        <p:nvSpPr>
-          <p:cNvPr id="23" name="TextBox 22"/>
-          <p:cNvSpPr txBox="1"/>
-          <p:nvPr/>
-        </p:nvSpPr>
-        <p:spPr>
-          <a:xfrm>
-            <a:off x="5248656" y="2331720"/>
-            <a:ext cx="1371600" cy="868680"/>
-          </a:xfrm>
-          <a:prstGeom prst="rect">
-            <a:avLst/>
-          </a:prstGeom>
-          <a:noFill/>
-        </p:spPr>
-        <p:txBody>
-          <a:bodyPr wrap="square" lIns="0" rIns="0" tIns="0" bIns="0" anchor="t"/>
-          <a:lstStyle/>
+              <a:t>주차면 263곳</a:t>
+            </a:r>
+          </a:p>
           <a:p>
             <a:pPr algn="l">
               <a:lnSpc>
                 <a:spcPct val="120000"/>
               </a:lnSpc>
-            </a:pPr>
-            <a:r>
-              <a:rPr sz="1250" b="0">
+              <a:spcBef>
+                <a:spcPts val="200"/>
+              </a:spcBef>
+            </a:pPr>
+            <a:r>
+              <a:rPr sz="1150" b="0">
                 <a:solidFill>
                   <a:srgbClr val="26282B"/>
                 </a:solidFill>
@@ -21382,6 +21364,45 @@
                 <a:ea typeface="Pretendard"/>
                 <a:cs typeface="Pretendard"/>
               </a:rPr>
+              <a:t>반경 100m 안 반납 금지</a:t>
+            </a:r>
+          </a:p>
+        </p:txBody>
+      </p:sp>
+      <p:sp>
+        <p:nvSpPr>
+          <p:cNvPr id="23" name="TextBox 22"/>
+          <p:cNvSpPr txBox="1"/>
+          <p:nvPr/>
+        </p:nvSpPr>
+        <p:spPr>
+          <a:xfrm>
+            <a:off x="5084064" y="2331720"/>
+            <a:ext cx="1536192" cy="868680"/>
+          </a:xfrm>
+          <a:prstGeom prst="rect">
+            <a:avLst/>
+          </a:prstGeom>
+          <a:noFill/>
+        </p:spPr>
+        <p:txBody>
+          <a:bodyPr wrap="square" lIns="0" rIns="0" tIns="0" bIns="0" anchor="t"/>
+          <a:lstStyle/>
+          <a:p>
+            <a:pPr algn="l">
+              <a:lnSpc>
+                <a:spcPct val="120000"/>
+              </a:lnSpc>
+            </a:pPr>
+            <a:r>
+              <a:rPr sz="1250" b="0">
+                <a:solidFill>
+                  <a:srgbClr val="26282B"/>
+                </a:solidFill>
+                <a:latin typeface="Pretendard"/>
+                <a:ea typeface="Pretendard"/>
+                <a:cs typeface="Pretendard"/>
+              </a:rPr>
               <a:t>뢰머광장~차일 거리</a:t>
             </a:r>
           </a:p>
@@ -21421,7 +21442,7 @@
                 <a:ea typeface="Pretendard SemiBold"/>
                 <a:cs typeface="Pretendard SemiBold"/>
               </a:rPr>
-              <a:t>주차면 100m 안·밖 각 200m: 100m당 기기 수, 방해·위험 비율 비교</a:t>
+              <a:t>주차면 100m 안·밖 각 200m의 100m당 기기 수와 방해·위험 비율 비교</a:t>
             </a:r>
           </a:p>
           <a:p>
@@ -21477,7 +21498,7 @@
         <p:spPr>
           <a:xfrm>
             <a:off x="685800" y="3300984"/>
-            <a:ext cx="1371600" cy="868680"/>
+            <a:ext cx="1280160" cy="868680"/>
           </a:xfrm>
           <a:prstGeom prst="rect">
             <a:avLst/>
@@ -21536,8 +21557,8 @@
         </p:nvSpPr>
         <p:spPr>
           <a:xfrm>
-            <a:off x="2148840" y="3300984"/>
-            <a:ext cx="502920" cy="868680"/>
+            <a:off x="2029968" y="3300984"/>
+            <a:ext cx="457200" cy="868680"/>
           </a:xfrm>
           <a:prstGeom prst="rect">
             <a:avLst/>
@@ -21575,7 +21596,7 @@
         </p:nvSpPr>
         <p:spPr>
           <a:xfrm>
-            <a:off x="2743200" y="3300984"/>
+            <a:off x="2578608" y="3300984"/>
             <a:ext cx="2395728" cy="868680"/>
           </a:xfrm>
           <a:prstGeom prst="rect">
@@ -21622,7 +21643,28 @@
                 <a:ea typeface="Pretendard"/>
                 <a:cs typeface="Pretendard"/>
               </a:rPr>
-              <a:t>3개 업체 1,200대, 구시가는 지정 구역에만 주차</a:t>
+              <a:t>3개 업체 1,200대</a:t>
+            </a:r>
+          </a:p>
+          <a:p>
+            <a:pPr algn="l">
+              <a:lnSpc>
+                <a:spcPct val="120000"/>
+              </a:lnSpc>
+              <a:spcBef>
+                <a:spcPts val="200"/>
+              </a:spcBef>
+            </a:pPr>
+            <a:r>
+              <a:rPr sz="1150" b="0">
+                <a:solidFill>
+                  <a:srgbClr val="26282B"/>
+                </a:solidFill>
+                <a:latin typeface="Pretendard"/>
+                <a:ea typeface="Pretendard"/>
+                <a:cs typeface="Pretendard"/>
+              </a:rPr>
+              <a:t>구시가는 지정 구역에만 주차</a:t>
             </a:r>
           </a:p>
         </p:txBody>
@@ -21635,8 +21677,8 @@
         </p:nvSpPr>
         <p:spPr>
           <a:xfrm>
-            <a:off x="5248656" y="3300984"/>
-            <a:ext cx="1371600" cy="868680"/>
+            <a:off x="5084064" y="3300984"/>
+            <a:ext cx="1536192" cy="868680"/>
           </a:xfrm>
           <a:prstGeom prst="rect">
             <a:avLst/>
@@ -21756,7 +21798,7 @@
         <p:spPr>
           <a:xfrm>
             <a:off x="685800" y="4270248"/>
-            <a:ext cx="1371600" cy="868680"/>
+            <a:ext cx="1280160" cy="868680"/>
           </a:xfrm>
           <a:prstGeom prst="rect">
             <a:avLst/>
@@ -21815,8 +21857,8 @@
         </p:nvSpPr>
         <p:spPr>
           <a:xfrm>
-            <a:off x="2148840" y="4270248"/>
-            <a:ext cx="502920" cy="868680"/>
+            <a:off x="2029968" y="4270248"/>
+            <a:ext cx="457200" cy="868680"/>
           </a:xfrm>
           <a:prstGeom prst="rect">
             <a:avLst/>
@@ -21854,7 +21896,7 @@
         </p:nvSpPr>
         <p:spPr>
           <a:xfrm>
-            <a:off x="2743200" y="4270248"/>
+            <a:off x="2578608" y="4270248"/>
             <a:ext cx="2395728" cy="868680"/>
           </a:xfrm>
           <a:prstGeom prst="rect">
@@ -21914,8 +21956,8 @@
         </p:nvSpPr>
         <p:spPr>
           <a:xfrm>
-            <a:off x="5248656" y="4270248"/>
-            <a:ext cx="1371600" cy="868680"/>
+            <a:off x="5084064" y="4270248"/>
+            <a:ext cx="1536192" cy="868680"/>
           </a:xfrm>
           <a:prstGeom prst="rect">
             <a:avLst/>
@@ -21940,7 +21982,25 @@
                 <a:ea typeface="Pretendard"/>
                 <a:cs typeface="Pretendard"/>
               </a:rPr>
-              <a:t>대성당 광장·라인강 다리</a:t>
+              <a:t>대성당 광장</a:t>
+            </a:r>
+          </a:p>
+          <a:p>
+            <a:pPr algn="l">
+              <a:lnSpc>
+                <a:spcPct val="120000"/>
+              </a:lnSpc>
+            </a:pPr>
+            <a:r>
+              <a:rPr sz="1250" b="0">
+                <a:solidFill>
+                  <a:srgbClr val="26282B"/>
+                </a:solidFill>
+                <a:latin typeface="Pretendard"/>
+                <a:ea typeface="Pretendard"/>
+                <a:cs typeface="Pretendard"/>
+              </a:rPr>
+              <a:t>라인강 다리</a:t>
             </a:r>
           </a:p>
         </p:txBody>
@@ -22423,7 +22483,7 @@
         <p:spPr>
           <a:xfrm>
             <a:off x="685800" y="1920239"/>
-            <a:ext cx="1371600" cy="274320"/>
+            <a:ext cx="1280160" cy="274320"/>
           </a:xfrm>
           <a:prstGeom prst="rect">
             <a:avLst/>
@@ -22461,8 +22521,8 @@
         </p:nvSpPr>
         <p:spPr>
           <a:xfrm>
-            <a:off x="2148840" y="1920239"/>
-            <a:ext cx="502920" cy="274320"/>
+            <a:off x="2029968" y="1920239"/>
+            <a:ext cx="457200" cy="274320"/>
           </a:xfrm>
           <a:prstGeom prst="rect">
             <a:avLst/>
@@ -22500,7 +22560,7 @@
         </p:nvSpPr>
         <p:spPr>
           <a:xfrm>
-            <a:off x="2743200" y="1920239"/>
+            <a:off x="2578608" y="1920239"/>
             <a:ext cx="2395728" cy="274320"/>
           </a:xfrm>
           <a:prstGeom prst="rect">
@@ -22539,8 +22599,8 @@
         </p:nvSpPr>
         <p:spPr>
           <a:xfrm>
-            <a:off x="5248656" y="1920239"/>
-            <a:ext cx="1371600" cy="274320"/>
+            <a:off x="5084064" y="1920239"/>
+            <a:ext cx="1536192" cy="274320"/>
           </a:xfrm>
           <a:prstGeom prst="rect">
             <a:avLst/>
@@ -22639,7 +22699,7 @@
         <p:spPr>
           <a:xfrm>
             <a:off x="685800" y="2331720"/>
-            <a:ext cx="1371600" cy="1005840"/>
+            <a:ext cx="1280160" cy="1005840"/>
           </a:xfrm>
           <a:prstGeom prst="rect">
             <a:avLst/>
@@ -22698,8 +22758,8 @@
         </p:nvSpPr>
         <p:spPr>
           <a:xfrm>
-            <a:off x="2148840" y="2331720"/>
-            <a:ext cx="502920" cy="1005840"/>
+            <a:off x="2029968" y="2331720"/>
+            <a:ext cx="457200" cy="1005840"/>
           </a:xfrm>
           <a:prstGeom prst="rect">
             <a:avLst/>
@@ -22737,7 +22797,7 @@
         </p:nvSpPr>
         <p:spPr>
           <a:xfrm>
-            <a:off x="2743200" y="2331720"/>
+            <a:off x="2578608" y="2331720"/>
             <a:ext cx="2395728" cy="1005840"/>
           </a:xfrm>
           <a:prstGeom prst="rect">
@@ -22784,38 +22844,20 @@
                 <a:ea typeface="Pretendard"/>
                 <a:cs typeface="Pretendard"/>
               </a:rPr>
-              <a:t>주차구역 1,700여 곳, 2025년 부상 666명, 12월 마지막 운행</a:t>
-            </a:r>
-          </a:p>
-        </p:txBody>
-      </p:sp>
-      <p:sp>
-        <p:nvSpPr>
-          <p:cNvPr id="23" name="TextBox 22"/>
-          <p:cNvSpPr txBox="1"/>
-          <p:nvPr/>
-        </p:nvSpPr>
-        <p:spPr>
-          <a:xfrm>
-            <a:off x="5248656" y="2331720"/>
-            <a:ext cx="1371600" cy="1005840"/>
-          </a:xfrm>
-          <a:prstGeom prst="rect">
-            <a:avLst/>
-          </a:prstGeom>
-          <a:noFill/>
-        </p:spPr>
-        <p:txBody>
-          <a:bodyPr wrap="square" lIns="0" rIns="0" tIns="0" bIns="0" anchor="t"/>
-          <a:lstStyle/>
+              <a:t>주차구역 1,700여 곳</a:t>
+            </a:r>
+          </a:p>
           <a:p>
             <a:pPr algn="l">
               <a:lnSpc>
                 <a:spcPct val="120000"/>
               </a:lnSpc>
-            </a:pPr>
-            <a:r>
-              <a:rPr sz="1250" b="0">
+              <a:spcBef>
+                <a:spcPts val="200"/>
+              </a:spcBef>
+            </a:pPr>
+            <a:r>
+              <a:rPr sz="1150" b="0">
                 <a:solidFill>
                   <a:srgbClr val="26282B"/>
                 </a:solidFill>
@@ -22823,6 +22865,45 @@
                 <a:ea typeface="Pretendard"/>
                 <a:cs typeface="Pretendard"/>
               </a:rPr>
+              <a:t>2025년 부상 666명, 12월 마지막 운행</a:t>
+            </a:r>
+          </a:p>
+        </p:txBody>
+      </p:sp>
+      <p:sp>
+        <p:nvSpPr>
+          <p:cNvPr id="23" name="TextBox 22"/>
+          <p:cNvSpPr txBox="1"/>
+          <p:nvPr/>
+        </p:nvSpPr>
+        <p:spPr>
+          <a:xfrm>
+            <a:off x="5084064" y="2331720"/>
+            <a:ext cx="1536192" cy="1005840"/>
+          </a:xfrm>
+          <a:prstGeom prst="rect">
+            <a:avLst/>
+          </a:prstGeom>
+          <a:noFill/>
+        </p:spPr>
+        <p:txBody>
+          <a:bodyPr wrap="square" lIns="0" rIns="0" tIns="0" bIns="0" anchor="t"/>
+          <a:lstStyle/>
+          <a:p>
+            <a:pPr algn="l">
+              <a:lnSpc>
+                <a:spcPct val="120000"/>
+              </a:lnSpc>
+            </a:pPr>
+            <a:r>
+              <a:rPr sz="1250" b="0">
+                <a:solidFill>
+                  <a:srgbClr val="26282B"/>
+                </a:solidFill>
+                <a:latin typeface="Pretendard"/>
+                <a:ea typeface="Pretendard"/>
+                <a:cs typeface="Pretendard"/>
+              </a:rPr>
               <a:t>그랑플라스 주변</a:t>
             </a:r>
           </a:p>
@@ -22862,7 +22943,7 @@
                 <a:ea typeface="Pretendard SemiBold"/>
                 <a:cs typeface="Pretendard SemiBold"/>
               </a:rPr>
-              <a:t>주차구역 근처·먼 곳 각 200m 비교: 가장 촘촘한 관리로도 보도가 비는지</a:t>
+              <a:t>주차구역 근처·먼 곳 200m씩 비교해 촘촘한 관리로도 보도가 비워지는지 확인</a:t>
             </a:r>
           </a:p>
           <a:p>
@@ -22918,7 +22999,7 @@
         <p:spPr>
           <a:xfrm>
             <a:off x="685800" y="3438144"/>
-            <a:ext cx="1371600" cy="1005840"/>
+            <a:ext cx="1280160" cy="1005840"/>
           </a:xfrm>
           <a:prstGeom prst="rect">
             <a:avLst/>
@@ -22977,8 +23058,8 @@
         </p:nvSpPr>
         <p:spPr>
           <a:xfrm>
-            <a:off x="2148840" y="3438144"/>
-            <a:ext cx="502920" cy="1005840"/>
+            <a:off x="2029968" y="3438144"/>
+            <a:ext cx="457200" cy="1005840"/>
           </a:xfrm>
           <a:prstGeom prst="rect">
             <a:avLst/>
@@ -23016,7 +23097,7 @@
         </p:nvSpPr>
         <p:spPr>
           <a:xfrm>
-            <a:off x="2743200" y="3438144"/>
+            <a:off x="2578608" y="3438144"/>
             <a:ext cx="2395728" cy="1005840"/>
           </a:xfrm>
           <a:prstGeom prst="rect">
@@ -23063,38 +23144,20 @@
                 <a:ea typeface="Pretendard"/>
                 <a:cs typeface="Pretendard"/>
               </a:rPr>
-              <a:t>2023 주민투표로 1.5만 대 퇴출, 공유 전기자전거는 운영 중</a:t>
-            </a:r>
-          </a:p>
-        </p:txBody>
-      </p:sp>
-      <p:sp>
-        <p:nvSpPr>
-          <p:cNvPr id="29" name="TextBox 28"/>
-          <p:cNvSpPr txBox="1"/>
-          <p:nvPr/>
-        </p:nvSpPr>
-        <p:spPr>
-          <a:xfrm>
-            <a:off x="5248656" y="3438144"/>
-            <a:ext cx="1371600" cy="1005840"/>
-          </a:xfrm>
-          <a:prstGeom prst="rect">
-            <a:avLst/>
-          </a:prstGeom>
-          <a:noFill/>
-        </p:spPr>
-        <p:txBody>
-          <a:bodyPr wrap="square" lIns="0" rIns="0" tIns="0" bIns="0" anchor="t"/>
-          <a:lstStyle/>
+              <a:t>2023 주민투표로 1.5만 대 퇴출</a:t>
+            </a:r>
+          </a:p>
           <a:p>
             <a:pPr algn="l">
               <a:lnSpc>
                 <a:spcPct val="120000"/>
               </a:lnSpc>
-            </a:pPr>
-            <a:r>
-              <a:rPr sz="1250" b="0">
+              <a:spcBef>
+                <a:spcPts val="200"/>
+              </a:spcBef>
+            </a:pPr>
+            <a:r>
+              <a:rPr sz="1150" b="0">
                 <a:solidFill>
                   <a:srgbClr val="26282B"/>
                 </a:solidFill>
@@ -23102,7 +23165,64 @@
                 <a:ea typeface="Pretendard"/>
                 <a:cs typeface="Pretendard"/>
               </a:rPr>
-              <a:t>루브르~리볼리 400m</a:t>
+              <a:t>공유 전기자전거는 운영 중</a:t>
+            </a:r>
+          </a:p>
+        </p:txBody>
+      </p:sp>
+      <p:sp>
+        <p:nvSpPr>
+          <p:cNvPr id="29" name="TextBox 28"/>
+          <p:cNvSpPr txBox="1"/>
+          <p:nvPr/>
+        </p:nvSpPr>
+        <p:spPr>
+          <a:xfrm>
+            <a:off x="5084064" y="3438144"/>
+            <a:ext cx="1536192" cy="1005840"/>
+          </a:xfrm>
+          <a:prstGeom prst="rect">
+            <a:avLst/>
+          </a:prstGeom>
+          <a:noFill/>
+        </p:spPr>
+        <p:txBody>
+          <a:bodyPr wrap="square" lIns="0" rIns="0" tIns="0" bIns="0" anchor="t"/>
+          <a:lstStyle/>
+          <a:p>
+            <a:pPr algn="l">
+              <a:lnSpc>
+                <a:spcPct val="120000"/>
+              </a:lnSpc>
+            </a:pPr>
+            <a:r>
+              <a:rPr sz="1250" b="0">
+                <a:solidFill>
+                  <a:srgbClr val="26282B"/>
+                </a:solidFill>
+                <a:latin typeface="Pretendard"/>
+                <a:ea typeface="Pretendard"/>
+                <a:cs typeface="Pretendard"/>
+              </a:rPr>
+              <a:t>루브르~리볼리</a:t>
+            </a:r>
+          </a:p>
+          <a:p>
+            <a:pPr algn="l">
+              <a:lnSpc>
+                <a:spcPct val="120000"/>
+              </a:lnSpc>
+            </a:pPr>
+            <a:r>
+              <a:rPr sz="1250" b="0">
+                <a:solidFill>
+                  <a:srgbClr val="26282B"/>
+                </a:solidFill>
+                <a:latin typeface="Pretendard"/>
+                <a:ea typeface="Pretendard"/>
+                <a:cs typeface="Pretendard"/>
+              </a:rPr>
+              <a:t>400m 구간</a:t>
             </a:r>
           </a:p>
         </p:txBody>
@@ -23683,7 +23803,7 @@
         <p:spPr>
           <a:xfrm>
             <a:off x="685800" y="1920239"/>
-            <a:ext cx="1371600" cy="274320"/>
+            <a:ext cx="1280160" cy="274320"/>
           </a:xfrm>
           <a:prstGeom prst="rect">
             <a:avLst/>
@@ -23721,8 +23841,8 @@
         </p:nvSpPr>
         <p:spPr>
           <a:xfrm>
-            <a:off x="2148840" y="1920239"/>
-            <a:ext cx="502920" cy="274320"/>
+            <a:off x="2029968" y="1920239"/>
+            <a:ext cx="457200" cy="274320"/>
           </a:xfrm>
           <a:prstGeom prst="rect">
             <a:avLst/>
@@ -23760,7 +23880,7 @@
         </p:nvSpPr>
         <p:spPr>
           <a:xfrm>
-            <a:off x="2743200" y="1920239"/>
+            <a:off x="2578608" y="1920239"/>
             <a:ext cx="2395728" cy="274320"/>
           </a:xfrm>
           <a:prstGeom prst="rect">
@@ -23799,8 +23919,8 @@
         </p:nvSpPr>
         <p:spPr>
           <a:xfrm>
-            <a:off x="5248656" y="1920239"/>
-            <a:ext cx="1371600" cy="274320"/>
+            <a:off x="5084064" y="1920239"/>
+            <a:ext cx="1536192" cy="274320"/>
           </a:xfrm>
           <a:prstGeom prst="rect">
             <a:avLst/>
@@ -23899,7 +24019,7 @@
         <p:spPr>
           <a:xfrm>
             <a:off x="685800" y="2331720"/>
-            <a:ext cx="1371600" cy="822960"/>
+            <a:ext cx="1280160" cy="822960"/>
           </a:xfrm>
           <a:prstGeom prst="rect">
             <a:avLst/>
@@ -23958,8 +24078,8 @@
         </p:nvSpPr>
         <p:spPr>
           <a:xfrm>
-            <a:off x="2148840" y="2331720"/>
-            <a:ext cx="502920" cy="822960"/>
+            <a:off x="2029968" y="2331720"/>
+            <a:ext cx="457200" cy="822960"/>
           </a:xfrm>
           <a:prstGeom prst="rect">
             <a:avLst/>
@@ -23997,7 +24117,7 @@
         </p:nvSpPr>
         <p:spPr>
           <a:xfrm>
-            <a:off x="2743200" y="2331720"/>
+            <a:off x="2578608" y="2331720"/>
             <a:ext cx="2395728" cy="822960"/>
           </a:xfrm>
           <a:prstGeom prst="rect">
@@ -24057,8 +24177,8 @@
         </p:nvSpPr>
         <p:spPr>
           <a:xfrm>
-            <a:off x="5248656" y="2331720"/>
-            <a:ext cx="1371600" cy="822960"/>
+            <a:off x="5084064" y="2331720"/>
+            <a:ext cx="1536192" cy="822960"/>
           </a:xfrm>
           <a:prstGeom prst="rect">
             <a:avLst/>
@@ -24157,7 +24277,7 @@
         <p:spPr>
           <a:xfrm>
             <a:off x="685800" y="3255264"/>
-            <a:ext cx="1371600" cy="822960"/>
+            <a:ext cx="1280160" cy="822960"/>
           </a:xfrm>
           <a:prstGeom prst="rect">
             <a:avLst/>
@@ -24216,8 +24336,8 @@
         </p:nvSpPr>
         <p:spPr>
           <a:xfrm>
-            <a:off x="2148840" y="3255264"/>
-            <a:ext cx="502920" cy="822960"/>
+            <a:off x="2029968" y="3255264"/>
+            <a:ext cx="457200" cy="822960"/>
           </a:xfrm>
           <a:prstGeom prst="rect">
             <a:avLst/>
@@ -24255,7 +24375,7 @@
         </p:nvSpPr>
         <p:spPr>
           <a:xfrm>
-            <a:off x="2743200" y="3255264"/>
+            <a:off x="2578608" y="3255264"/>
             <a:ext cx="2395728" cy="822960"/>
           </a:xfrm>
           <a:prstGeom prst="rect">
@@ -24302,7 +24422,28 @@
                 <a:ea typeface="Pretendard"/>
                 <a:cs typeface="Pretendard"/>
               </a:rPr>
-              <a:t>2019년부터 공유 킥보드 불허, 거치대형 공공자전거만 운영</a:t>
+              <a:t>2019년부터 공유 킥보드 불허</a:t>
+            </a:r>
+          </a:p>
+          <a:p>
+            <a:pPr algn="l">
+              <a:lnSpc>
+                <a:spcPct val="120000"/>
+              </a:lnSpc>
+              <a:spcBef>
+                <a:spcPts val="200"/>
+              </a:spcBef>
+            </a:pPr>
+            <a:r>
+              <a:rPr sz="1150" b="0">
+                <a:solidFill>
+                  <a:srgbClr val="26282B"/>
+                </a:solidFill>
+                <a:latin typeface="Pretendard"/>
+                <a:ea typeface="Pretendard"/>
+                <a:cs typeface="Pretendard"/>
+              </a:rPr>
+              <a:t>거치대형 공공자전거만 운영</a:t>
             </a:r>
           </a:p>
         </p:txBody>
@@ -24315,8 +24456,8 @@
         </p:nvSpPr>
         <p:spPr>
           <a:xfrm>
-            <a:off x="5248656" y="3255264"/>
-            <a:ext cx="1371600" cy="822960"/>
+            <a:off x="5084064" y="3255264"/>
+            <a:ext cx="1536192" cy="822960"/>
           </a:xfrm>
           <a:prstGeom prst="rect">
             <a:avLst/>
@@ -24436,7 +24577,7 @@
         <p:spPr>
           <a:xfrm>
             <a:off x="685800" y="4178808"/>
-            <a:ext cx="1371600" cy="822960"/>
+            <a:ext cx="1280160" cy="822960"/>
           </a:xfrm>
           <a:prstGeom prst="rect">
             <a:avLst/>
@@ -24495,8 +24636,8 @@
         </p:nvSpPr>
         <p:spPr>
           <a:xfrm>
-            <a:off x="2148840" y="4178808"/>
-            <a:ext cx="502920" cy="822960"/>
+            <a:off x="2029968" y="4178808"/>
+            <a:ext cx="457200" cy="822960"/>
           </a:xfrm>
           <a:prstGeom prst="rect">
             <a:avLst/>
@@ -24534,7 +24675,7 @@
         </p:nvSpPr>
         <p:spPr>
           <a:xfrm>
-            <a:off x="2743200" y="4178808"/>
+            <a:off x="2578608" y="4178808"/>
             <a:ext cx="2395728" cy="822960"/>
           </a:xfrm>
           <a:prstGeom prst="rect">
@@ -24581,38 +24722,20 @@
                 <a:ea typeface="Pretendard"/>
                 <a:cs typeface="Pretendard"/>
               </a:rPr>
-              <a:t>공유 킥보드 허가 없음, 공유 전기자전거·스쿠터는 허가</a:t>
-            </a:r>
-          </a:p>
-        </p:txBody>
-      </p:sp>
-      <p:sp>
-        <p:nvSpPr>
-          <p:cNvPr id="35" name="TextBox 34"/>
-          <p:cNvSpPr txBox="1"/>
-          <p:nvPr/>
-        </p:nvSpPr>
-        <p:spPr>
-          <a:xfrm>
-            <a:off x="5248656" y="4178808"/>
-            <a:ext cx="1371600" cy="822960"/>
-          </a:xfrm>
-          <a:prstGeom prst="rect">
-            <a:avLst/>
-          </a:prstGeom>
-          <a:noFill/>
-        </p:spPr>
-        <p:txBody>
-          <a:bodyPr wrap="square" lIns="0" rIns="0" tIns="0" bIns="0" anchor="t"/>
-          <a:lstStyle/>
+              <a:t>공유 킥보드 허가 없음</a:t>
+            </a:r>
+          </a:p>
           <a:p>
             <a:pPr algn="l">
               <a:lnSpc>
                 <a:spcPct val="120000"/>
               </a:lnSpc>
-            </a:pPr>
-            <a:r>
-              <a:rPr sz="1250" b="0">
+              <a:spcBef>
+                <a:spcPts val="200"/>
+              </a:spcBef>
+            </a:pPr>
+            <a:r>
+              <a:rPr sz="1150" b="0">
                 <a:solidFill>
                   <a:srgbClr val="26282B"/>
                 </a:solidFill>
@@ -24620,6 +24743,45 @@
                 <a:ea typeface="Pretendard"/>
                 <a:cs typeface="Pretendard"/>
               </a:rPr>
+              <a:t>공유 전기자전거·스쿠터는 허가</a:t>
+            </a:r>
+          </a:p>
+        </p:txBody>
+      </p:sp>
+      <p:sp>
+        <p:nvSpPr>
+          <p:cNvPr id="35" name="TextBox 34"/>
+          <p:cNvSpPr txBox="1"/>
+          <p:nvPr/>
+        </p:nvSpPr>
+        <p:spPr>
+          <a:xfrm>
+            <a:off x="5084064" y="4178808"/>
+            <a:ext cx="1536192" cy="822960"/>
+          </a:xfrm>
+          <a:prstGeom prst="rect">
+            <a:avLst/>
+          </a:prstGeom>
+          <a:noFill/>
+        </p:spPr>
+        <p:txBody>
+          <a:bodyPr wrap="square" lIns="0" rIns="0" tIns="0" bIns="0" anchor="t"/>
+          <a:lstStyle/>
+          <a:p>
+            <a:pPr algn="l">
+              <a:lnSpc>
+                <a:spcPct val="120000"/>
+              </a:lnSpc>
+            </a:pPr>
+            <a:r>
+              <a:rPr sz="1250" b="0">
+                <a:solidFill>
+                  <a:srgbClr val="26282B"/>
+                </a:solidFill>
+                <a:latin typeface="Pretendard"/>
+                <a:ea typeface="Pretendard"/>
+                <a:cs typeface="Pretendard"/>
+              </a:rPr>
               <a:t>람블라스 거리 400m</a:t>
             </a:r>
           </a:p>
@@ -24659,7 +24821,7 @@
                 <a:ea typeface="Pretendard SemiBold"/>
                 <a:cs typeface="Pretendard SemiBold"/>
               </a:rPr>
-              <a:t>공유 전기자전거를 세고 ○ △ × 분류</a:t>
+              <a:t>공유 전기자전거를 세고 주차 상태(○ △ ×) 분류</a:t>
             </a:r>
           </a:p>
           <a:p>
@@ -28927,7 +29089,25 @@
                 <a:ea typeface="Pretendard Medium"/>
                 <a:cs typeface="Pretendard Medium"/>
               </a:rPr>
-              <a:t>사전 조사(완료) · 기준표 초안</a:t>
+              <a:t>사전 조사(완료)</a:t>
+            </a:r>
+          </a:p>
+          <a:p>
+            <a:pPr algn="l">
+              <a:lnSpc>
+                <a:spcPct val="110000"/>
+              </a:lnSpc>
+            </a:pPr>
+            <a:r>
+              <a:rPr sz="1100" b="0">
+                <a:solidFill>
+                  <a:srgbClr val="FFFFFF"/>
+                </a:solidFill>
+                <a:latin typeface="Pretendard Medium"/>
+                <a:ea typeface="Pretendard Medium"/>
+                <a:cs typeface="Pretendard Medium"/>
+              </a:rPr>
+              <a:t>기준표 초안</a:t>
             </a:r>
           </a:p>
         </p:txBody>
@@ -34282,7 +34462,25 @@
                 <a:ea typeface="Pretendard"/>
                 <a:cs typeface="Pretendard"/>
               </a:rPr>
-              <a:t>설문은 실제와 다를 수 있습니다. 워싱턴DC·오클랜드 연구: 시민은 20~30% 이상이 잘못 세워졌다고 느꼈지만, 실제 규정 위반은 15~19%, 보행 방해는 5~6% (Klein 외, 2023)</a:t>
+              <a:t>설문은 실제와 다를 수 있습니다. 워싱턴DC·오클랜드 연구에서 시민은 20~30% 이상이 잘못 세워졌다고 느꼈지만,</a:t>
+            </a:r>
+          </a:p>
+          <a:p>
+            <a:pPr algn="l">
+              <a:lnSpc>
+                <a:spcPct val="125000"/>
+              </a:lnSpc>
+            </a:pPr>
+            <a:r>
+              <a:rPr sz="1250" b="0">
+                <a:solidFill>
+                  <a:srgbClr val="26282B"/>
+                </a:solidFill>
+                <a:latin typeface="Pretendard"/>
+                <a:ea typeface="Pretendard"/>
+                <a:cs typeface="Pretendard"/>
+              </a:rPr>
+              <a:t>실제 규정 위반은 15~19%, 보행 방해는 5~6%였습니다 (Klein 외, 2023).</a:t>
             </a:r>
           </a:p>
         </p:txBody>
@@ -34665,7 +34863,7 @@
         </p:nvSpPr>
         <p:spPr>
           <a:xfrm>
-            <a:off x="685800" y="5468112"/>
+            <a:off x="685800" y="5522976"/>
             <a:ext cx="10817352" cy="228600"/>
           </a:xfrm>
           <a:prstGeom prst="rect">
@@ -36284,7 +36482,25 @@
                 <a:ea typeface="Pretendard"/>
                 <a:cs typeface="Pretendard"/>
               </a:rPr>
-              <a:t>킥보드를 막아도 그 자리를 다른 공유 기기가 채울 수 있습니다. 그래서 공유 전기자전거까지 함께 셉니다.</a:t>
+              <a:t>킥보드를 막아도 그 자리를 다른 공유 기기가 채울 수 있습니다.</a:t>
+            </a:r>
+          </a:p>
+          <a:p>
+            <a:pPr algn="l">
+              <a:lnSpc>
+                <a:spcPct val="125000"/>
+              </a:lnSpc>
+            </a:pPr>
+            <a:r>
+              <a:rPr sz="1250" b="0">
+                <a:solidFill>
+                  <a:srgbClr val="5B6066"/>
+                </a:solidFill>
+                <a:latin typeface="Pretendard"/>
+                <a:ea typeface="Pretendard"/>
+                <a:cs typeface="Pretendard"/>
+              </a:rPr>
+              <a:t>그래서 공유 전기자전거까지 함께 셉니다.</a:t>
             </a:r>
           </a:p>
         </p:txBody>
@@ -36401,7 +36617,25 @@
                 <a:ea typeface="Pretendard"/>
                 <a:cs typeface="Pretendard"/>
               </a:rPr>
-              <a:t>유럽 4개 도시와 서울 2곳의 보도 위 공유 이동수단을 같은 기준으로 셉니다</a:t>
+              <a:t>유럽 4개 도시와 서울 2곳의 보도 위 공유 이동수단을</a:t>
+            </a:r>
+          </a:p>
+          <a:p>
+            <a:pPr algn="l">
+              <a:lnSpc>
+                <a:spcPct val="125000"/>
+              </a:lnSpc>
+            </a:pPr>
+            <a:r>
+              <a:rPr sz="1400" b="0">
+                <a:solidFill>
+                  <a:srgbClr val="26282B"/>
+                </a:solidFill>
+                <a:latin typeface="Pretendard"/>
+                <a:ea typeface="Pretendard"/>
+                <a:cs typeface="Pretendard"/>
+              </a:rPr>
+              <a:t>같은 기준으로 셉니다</a:t>
             </a:r>
           </a:p>
         </p:txBody>
@@ -36479,7 +36713,25 @@
                 <a:ea typeface="Pretendard"/>
                 <a:cs typeface="Pretendard"/>
               </a:rPr>
-              <a:t>규제 방식, 주차구역과의 거리, 금지 구역 안팎에 따라 주차 상태를 비교합니다</a:t>
+              <a:t>규제 방식, 주차구역과의 거리, 금지 구역 안팎에 따라</a:t>
+            </a:r>
+          </a:p>
+          <a:p>
+            <a:pPr algn="l">
+              <a:lnSpc>
+                <a:spcPct val="125000"/>
+              </a:lnSpc>
+            </a:pPr>
+            <a:r>
+              <a:rPr sz="1400" b="0">
+                <a:solidFill>
+                  <a:srgbClr val="26282B"/>
+                </a:solidFill>
+                <a:latin typeface="Pretendard"/>
+                <a:ea typeface="Pretendard"/>
+                <a:cs typeface="Pretendard"/>
+              </a:rPr>
+              <a:t>주차 상태를 비교합니다</a:t>
             </a:r>
           </a:p>
         </p:txBody>
@@ -40175,7 +40427,28 @@
                 <a:ea typeface="Pretendard"/>
                 <a:cs typeface="Pretendard"/>
               </a:rPr>
-              <a:t>출국 전 서울 사진을 두 사람이 따로 판정해 일치율 확인</a:t>
+              <a:t>출국 전 서울 사진을</a:t>
+            </a:r>
+          </a:p>
+          <a:p>
+            <a:pPr algn="l">
+              <a:lnSpc>
+                <a:spcPct val="125000"/>
+              </a:lnSpc>
+              <a:spcBef>
+                <a:spcPts val="200"/>
+              </a:spcBef>
+            </a:pPr>
+            <a:r>
+              <a:rPr sz="1250" b="0">
+                <a:solidFill>
+                  <a:srgbClr val="26282B"/>
+                </a:solidFill>
+                <a:latin typeface="Pretendard"/>
+                <a:ea typeface="Pretendard"/>
+                <a:cs typeface="Pretendard"/>
+              </a:rPr>
+              <a:t>두 사람이 따로 판정해 일치율 확인</a:t>
             </a:r>
           </a:p>
         </p:txBody>
@@ -40262,7 +40535,28 @@
                 <a:ea typeface="Pretendard"/>
                 <a:cs typeface="Pretendard"/>
               </a:rPr>
-              <a:t>이미지를 보는 AI 모델에 기준표와 예시 사진을 주고 분류</a:t>
+              <a:t>이미지를 보는 AI 모델에</a:t>
+            </a:r>
+          </a:p>
+          <a:p>
+            <a:pPr algn="l">
+              <a:lnSpc>
+                <a:spcPct val="125000"/>
+              </a:lnSpc>
+              <a:spcBef>
+                <a:spcPts val="200"/>
+              </a:spcBef>
+            </a:pPr>
+            <a:r>
+              <a:rPr sz="1250" b="0">
+                <a:solidFill>
+                  <a:srgbClr val="26282B"/>
+                </a:solidFill>
+                <a:latin typeface="Pretendard"/>
+                <a:ea typeface="Pretendard"/>
+                <a:cs typeface="Pretendard"/>
+              </a:rPr>
+              <a:t>기준표와 예시 사진을 주고 분류</a:t>
             </a:r>
           </a:p>
         </p:txBody>
